--- a/templates/carousels/numbered-checklist.pptx
+++ b/templates/carousels/numbered-checklist.pptx
@@ -4010,7 +4010,7 @@
           <a:p>
             <a:pPr algn="ctr"/>
             <a:r>
-              <a:rPr sz="2400" b="1" i="0">
+              <a:rPr sz="3000" b="1" i="0">
                 <a:solidFill>
                   <a:srgbClr val="22371F"/>
                 </a:solidFill>
@@ -4084,13 +4084,13 @@
           <a:p>
             <a:pPr algn="l"/>
             <a:r>
-              <a:rPr sz="2850" b="0" i="1">
+              <a:rPr sz="5700" b="0" i="1">
                 <a:solidFill>
                   <a:srgbClr val="DBE6A7"/>
                 </a:solidFill>
                 <a:latin typeface="EB Garamond"/>
               </a:rPr>
-              <a:t>[COPY: Allison] One line: who this is for, and the season.</a:t>
+              <a:t>[COPY: Allison] Who this is for, and when.</a:t>
             </a:r>
           </a:p>
         </p:txBody>
@@ -4119,7 +4119,7 @@
           <a:p>
             <a:pPr algn="l"/>
             <a:r>
-              <a:rPr sz="2100" b="1" i="0">
+              <a:rPr sz="3000" b="1" i="0">
                 <a:solidFill>
                   <a:srgbClr val="A7B097"/>
                 </a:solidFill>
@@ -4527,13 +4527,13 @@
               </a:lnSpc>
             </a:pPr>
             <a:r>
-              <a:rPr sz="3600" b="1" i="0">
+              <a:rPr sz="5700" b="1" i="0">
                 <a:solidFill>
                   <a:srgbClr val="22371F"/>
                 </a:solidFill>
                 <a:latin typeface="Montserrat"/>
               </a:rPr>
-              <a:t>[COPY: Allison] Item 1: one line, an action the reader can do today.</a:t>
+              <a:t>[COPY: Allison] Item 1: one action.</a:t>
             </a:r>
           </a:p>
         </p:txBody>
@@ -4547,7 +4547,7 @@
         <p:spPr>
           <a:xfrm>
             <a:off x="4953000" y="8382000"/>
-            <a:ext cx="1143000" cy="1143000"/>
+            <a:ext cx="1428750" cy="1428750"/>
           </a:xfrm>
           <a:prstGeom prst="ellipse">
             <a:avLst/>
@@ -4593,7 +4593,7 @@
         <p:spPr>
           <a:xfrm>
             <a:off x="4953000" y="8382000"/>
-            <a:ext cx="1143000" cy="1143000"/>
+            <a:ext cx="1428750" cy="1428750"/>
           </a:xfrm>
           <a:prstGeom prst="rect">
             <a:avLst/>
@@ -4608,13 +4608,13 @@
           <a:p>
             <a:pPr algn="ctr"/>
             <a:r>
-              <a:rPr sz="1650" b="1" i="0">
+              <a:rPr sz="3000" b="1" i="0">
                 <a:solidFill>
                   <a:srgbClr val="156826"/>
                 </a:solidFill>
                 <a:latin typeface="Montserrat"/>
               </a:rPr>
-              <a:t>[ICON]</a:t>
+              <a:t>ICON</a:t>
             </a:r>
           </a:p>
         </p:txBody>
@@ -4643,7 +4643,7 @@
           <a:p>
             <a:pPr algn="l"/>
             <a:r>
-              <a:rPr sz="2100" b="1" i="0">
+              <a:rPr sz="3000" b="1" i="0">
                 <a:solidFill>
                   <a:srgbClr val="156826"/>
                 </a:solidFill>
@@ -4678,7 +4678,7 @@
           <a:p>
             <a:pPr algn="l"/>
             <a:r>
-              <a:rPr sz="2100" b="1" i="0">
+              <a:rPr sz="3000" b="1" i="0">
                 <a:solidFill>
                   <a:srgbClr val="6A665C"/>
                 </a:solidFill>
@@ -5086,13 +5086,13 @@
               </a:lnSpc>
             </a:pPr>
             <a:r>
-              <a:rPr sz="3600" b="1" i="0">
+              <a:rPr sz="5700" b="1" i="0">
                 <a:solidFill>
                   <a:srgbClr val="22371F"/>
                 </a:solidFill>
                 <a:latin typeface="Montserrat"/>
               </a:rPr>
-              <a:t>[COPY: Allison] Item 2: one line, an action the reader can do today.</a:t>
+              <a:t>[COPY: Allison] Item 2: one action.</a:t>
             </a:r>
           </a:p>
         </p:txBody>
@@ -5106,7 +5106,7 @@
         <p:spPr>
           <a:xfrm>
             <a:off x="4953000" y="8382000"/>
-            <a:ext cx="1143000" cy="1143000"/>
+            <a:ext cx="1428750" cy="1428750"/>
           </a:xfrm>
           <a:prstGeom prst="ellipse">
             <a:avLst/>
@@ -5152,7 +5152,7 @@
         <p:spPr>
           <a:xfrm>
             <a:off x="4953000" y="8382000"/>
-            <a:ext cx="1143000" cy="1143000"/>
+            <a:ext cx="1428750" cy="1428750"/>
           </a:xfrm>
           <a:prstGeom prst="rect">
             <a:avLst/>
@@ -5167,13 +5167,13 @@
           <a:p>
             <a:pPr algn="ctr"/>
             <a:r>
-              <a:rPr sz="1650" b="1" i="0">
+              <a:rPr sz="3000" b="1" i="0">
                 <a:solidFill>
                   <a:srgbClr val="156826"/>
                 </a:solidFill>
                 <a:latin typeface="Montserrat"/>
               </a:rPr>
-              <a:t>[ICON]</a:t>
+              <a:t>ICON</a:t>
             </a:r>
           </a:p>
         </p:txBody>
@@ -5202,7 +5202,7 @@
           <a:p>
             <a:pPr algn="l"/>
             <a:r>
-              <a:rPr sz="2100" b="1" i="0">
+              <a:rPr sz="3000" b="1" i="0">
                 <a:solidFill>
                   <a:srgbClr val="156826"/>
                 </a:solidFill>
@@ -5237,7 +5237,7 @@
           <a:p>
             <a:pPr algn="l"/>
             <a:r>
-              <a:rPr sz="2100" b="1" i="0">
+              <a:rPr sz="3000" b="1" i="0">
                 <a:solidFill>
                   <a:srgbClr val="6A665C"/>
                 </a:solidFill>
@@ -5645,13 +5645,13 @@
               </a:lnSpc>
             </a:pPr>
             <a:r>
-              <a:rPr sz="3600" b="1" i="0">
+              <a:rPr sz="5700" b="1" i="0">
                 <a:solidFill>
                   <a:srgbClr val="22371F"/>
                 </a:solidFill>
                 <a:latin typeface="Montserrat"/>
               </a:rPr>
-              <a:t>[COPY: Allison] Item 3: one line, an action the reader can do today.</a:t>
+              <a:t>[COPY: Allison] Item 3: one action.</a:t>
             </a:r>
           </a:p>
         </p:txBody>
@@ -5665,7 +5665,7 @@
         <p:spPr>
           <a:xfrm>
             <a:off x="4953000" y="8382000"/>
-            <a:ext cx="1143000" cy="1143000"/>
+            <a:ext cx="1428750" cy="1428750"/>
           </a:xfrm>
           <a:prstGeom prst="ellipse">
             <a:avLst/>
@@ -5711,7 +5711,7 @@
         <p:spPr>
           <a:xfrm>
             <a:off x="4953000" y="8382000"/>
-            <a:ext cx="1143000" cy="1143000"/>
+            <a:ext cx="1428750" cy="1428750"/>
           </a:xfrm>
           <a:prstGeom prst="rect">
             <a:avLst/>
@@ -5726,13 +5726,13 @@
           <a:p>
             <a:pPr algn="ctr"/>
             <a:r>
-              <a:rPr sz="1650" b="1" i="0">
+              <a:rPr sz="3000" b="1" i="0">
                 <a:solidFill>
                   <a:srgbClr val="156826"/>
                 </a:solidFill>
                 <a:latin typeface="Montserrat"/>
               </a:rPr>
-              <a:t>[ICON]</a:t>
+              <a:t>ICON</a:t>
             </a:r>
           </a:p>
         </p:txBody>
@@ -5761,7 +5761,7 @@
           <a:p>
             <a:pPr algn="l"/>
             <a:r>
-              <a:rPr sz="2100" b="1" i="0">
+              <a:rPr sz="3000" b="1" i="0">
                 <a:solidFill>
                   <a:srgbClr val="156826"/>
                 </a:solidFill>
@@ -5796,7 +5796,7 @@
           <a:p>
             <a:pPr algn="l"/>
             <a:r>
-              <a:rPr sz="2100" b="1" i="0">
+              <a:rPr sz="3000" b="1" i="0">
                 <a:solidFill>
                   <a:srgbClr val="6A665C"/>
                 </a:solidFill>
@@ -6204,13 +6204,13 @@
               </a:lnSpc>
             </a:pPr>
             <a:r>
-              <a:rPr sz="3600" b="1" i="0">
+              <a:rPr sz="5700" b="1" i="0">
                 <a:solidFill>
                   <a:srgbClr val="22371F"/>
                 </a:solidFill>
                 <a:latin typeface="Montserrat"/>
               </a:rPr>
-              <a:t>[COPY: Allison] Item 4: one line, an action the reader can do today.</a:t>
+              <a:t>[COPY: Allison] Item 4: one action.</a:t>
             </a:r>
           </a:p>
         </p:txBody>
@@ -6224,7 +6224,7 @@
         <p:spPr>
           <a:xfrm>
             <a:off x="4953000" y="8382000"/>
-            <a:ext cx="1143000" cy="1143000"/>
+            <a:ext cx="1428750" cy="1428750"/>
           </a:xfrm>
           <a:prstGeom prst="ellipse">
             <a:avLst/>
@@ -6270,7 +6270,7 @@
         <p:spPr>
           <a:xfrm>
             <a:off x="4953000" y="8382000"/>
-            <a:ext cx="1143000" cy="1143000"/>
+            <a:ext cx="1428750" cy="1428750"/>
           </a:xfrm>
           <a:prstGeom prst="rect">
             <a:avLst/>
@@ -6285,13 +6285,13 @@
           <a:p>
             <a:pPr algn="ctr"/>
             <a:r>
-              <a:rPr sz="1650" b="1" i="0">
+              <a:rPr sz="3000" b="1" i="0">
                 <a:solidFill>
                   <a:srgbClr val="156826"/>
                 </a:solidFill>
                 <a:latin typeface="Montserrat"/>
               </a:rPr>
-              <a:t>[ICON]</a:t>
+              <a:t>ICON</a:t>
             </a:r>
           </a:p>
         </p:txBody>
@@ -6320,7 +6320,7 @@
           <a:p>
             <a:pPr algn="l"/>
             <a:r>
-              <a:rPr sz="2100" b="1" i="0">
+              <a:rPr sz="3000" b="1" i="0">
                 <a:solidFill>
                   <a:srgbClr val="156826"/>
                 </a:solidFill>
@@ -6355,7 +6355,7 @@
           <a:p>
             <a:pPr algn="l"/>
             <a:r>
-              <a:rPr sz="2100" b="1" i="0">
+              <a:rPr sz="3000" b="1" i="0">
                 <a:solidFill>
                   <a:srgbClr val="6A665C"/>
                 </a:solidFill>
@@ -6763,13 +6763,13 @@
               </a:lnSpc>
             </a:pPr>
             <a:r>
-              <a:rPr sz="3600" b="1" i="0">
+              <a:rPr sz="5700" b="1" i="0">
                 <a:solidFill>
                   <a:srgbClr val="22371F"/>
                 </a:solidFill>
                 <a:latin typeface="Montserrat"/>
               </a:rPr>
-              <a:t>[COPY: Allison] Item 5: one line, an action the reader can do today.</a:t>
+              <a:t>[COPY: Allison] Item 5: one action.</a:t>
             </a:r>
           </a:p>
         </p:txBody>
@@ -6783,7 +6783,7 @@
         <p:spPr>
           <a:xfrm>
             <a:off x="4953000" y="8382000"/>
-            <a:ext cx="1143000" cy="1143000"/>
+            <a:ext cx="1428750" cy="1428750"/>
           </a:xfrm>
           <a:prstGeom prst="ellipse">
             <a:avLst/>
@@ -6829,7 +6829,7 @@
         <p:spPr>
           <a:xfrm>
             <a:off x="4953000" y="8382000"/>
-            <a:ext cx="1143000" cy="1143000"/>
+            <a:ext cx="1428750" cy="1428750"/>
           </a:xfrm>
           <a:prstGeom prst="rect">
             <a:avLst/>
@@ -6844,13 +6844,13 @@
           <a:p>
             <a:pPr algn="ctr"/>
             <a:r>
-              <a:rPr sz="1650" b="1" i="0">
+              <a:rPr sz="3000" b="1" i="0">
                 <a:solidFill>
                   <a:srgbClr val="156826"/>
                 </a:solidFill>
                 <a:latin typeface="Montserrat"/>
               </a:rPr>
-              <a:t>[ICON]</a:t>
+              <a:t>ICON</a:t>
             </a:r>
           </a:p>
         </p:txBody>
@@ -6879,7 +6879,7 @@
           <a:p>
             <a:pPr algn="l"/>
             <a:r>
-              <a:rPr sz="2100" b="1" i="0">
+              <a:rPr sz="3000" b="1" i="0">
                 <a:solidFill>
                   <a:srgbClr val="156826"/>
                 </a:solidFill>
@@ -6914,7 +6914,7 @@
           <a:p>
             <a:pPr algn="l"/>
             <a:r>
-              <a:rPr sz="2100" b="1" i="0">
+              <a:rPr sz="3000" b="1" i="0">
                 <a:solidFill>
                   <a:srgbClr val="6A665C"/>
                 </a:solidFill>
@@ -7268,7 +7268,7 @@
         <p:spPr>
           <a:xfrm>
             <a:off x="571500" y="571500"/>
-            <a:ext cx="8572500" cy="381000"/>
+            <a:ext cx="9144000" cy="381000"/>
           </a:xfrm>
           <a:prstGeom prst="rect">
             <a:avLst/>
@@ -7283,7 +7283,7 @@
           <a:p>
             <a:pPr algn="l"/>
             <a:r>
-              <a:rPr sz="2100" b="1" i="0">
+              <a:rPr sz="3000" b="1" i="0">
                 <a:solidFill>
                   <a:srgbClr val="156826"/>
                 </a:solidFill>
@@ -7322,7 +7322,7 @@
               </a:lnSpc>
             </a:pPr>
             <a:r>
-              <a:rPr sz="4050" b="1" i="0">
+              <a:rPr sz="3600" b="1" i="0">
                 <a:solidFill>
                   <a:srgbClr val="22371F"/>
                 </a:solidFill>
@@ -7445,7 +7445,7 @@
           <a:p>
             <a:pPr algn="ctr"/>
             <a:r>
-              <a:rPr sz="2700" b="1" i="0">
+              <a:rPr sz="3000" b="1" i="0">
                 <a:solidFill>
                   <a:srgbClr val="DBE6A7"/>
                 </a:solidFill>
@@ -7480,13 +7480,13 @@
           <a:p>
             <a:pPr algn="l"/>
             <a:r>
-              <a:rPr sz="2850" b="1" i="0">
+              <a:rPr sz="3300" b="1" i="0">
                 <a:solidFill>
                   <a:srgbClr val="22371F"/>
                 </a:solidFill>
                 <a:latin typeface="Montserrat"/>
               </a:rPr>
-              <a:t>[COPY: Allison] Item 1, short form.</a:t>
+              <a:t>[COPY: Allison] Item 1</a:t>
             </a:r>
           </a:p>
         </p:txBody>
@@ -7603,7 +7603,7 @@
           <a:p>
             <a:pPr algn="ctr"/>
             <a:r>
-              <a:rPr sz="2700" b="1" i="0">
+              <a:rPr sz="3000" b="1" i="0">
                 <a:solidFill>
                   <a:srgbClr val="DBE6A7"/>
                 </a:solidFill>
@@ -7638,13 +7638,13 @@
           <a:p>
             <a:pPr algn="l"/>
             <a:r>
-              <a:rPr sz="2850" b="1" i="0">
+              <a:rPr sz="3300" b="1" i="0">
                 <a:solidFill>
                   <a:srgbClr val="22371F"/>
                 </a:solidFill>
                 <a:latin typeface="Montserrat"/>
               </a:rPr>
-              <a:t>[COPY: Allison] Item 2, short form.</a:t>
+              <a:t>[COPY: Allison] Item 2</a:t>
             </a:r>
           </a:p>
         </p:txBody>
@@ -7761,7 +7761,7 @@
           <a:p>
             <a:pPr algn="ctr"/>
             <a:r>
-              <a:rPr sz="2700" b="1" i="0">
+              <a:rPr sz="3000" b="1" i="0">
                 <a:solidFill>
                   <a:srgbClr val="DBE6A7"/>
                 </a:solidFill>
@@ -7796,13 +7796,13 @@
           <a:p>
             <a:pPr algn="l"/>
             <a:r>
-              <a:rPr sz="2850" b="1" i="0">
+              <a:rPr sz="3300" b="1" i="0">
                 <a:solidFill>
                   <a:srgbClr val="22371F"/>
                 </a:solidFill>
                 <a:latin typeface="Montserrat"/>
               </a:rPr>
-              <a:t>[COPY: Allison] Item 3, short form.</a:t>
+              <a:t>[COPY: Allison] Item 3</a:t>
             </a:r>
           </a:p>
         </p:txBody>
@@ -7919,7 +7919,7 @@
           <a:p>
             <a:pPr algn="ctr"/>
             <a:r>
-              <a:rPr sz="2700" b="1" i="0">
+              <a:rPr sz="3000" b="1" i="0">
                 <a:solidFill>
                   <a:srgbClr val="DBE6A7"/>
                 </a:solidFill>
@@ -7954,13 +7954,13 @@
           <a:p>
             <a:pPr algn="l"/>
             <a:r>
-              <a:rPr sz="2850" b="1" i="0">
+              <a:rPr sz="3300" b="1" i="0">
                 <a:solidFill>
                   <a:srgbClr val="22371F"/>
                 </a:solidFill>
                 <a:latin typeface="Montserrat"/>
               </a:rPr>
-              <a:t>[COPY: Allison] Item 4, short form.</a:t>
+              <a:t>[COPY: Allison] Item 4</a:t>
             </a:r>
           </a:p>
         </p:txBody>
@@ -8077,7 +8077,7 @@
           <a:p>
             <a:pPr algn="ctr"/>
             <a:r>
-              <a:rPr sz="2700" b="1" i="0">
+              <a:rPr sz="3000" b="1" i="0">
                 <a:solidFill>
                   <a:srgbClr val="DBE6A7"/>
                 </a:solidFill>
@@ -8112,13 +8112,13 @@
           <a:p>
             <a:pPr algn="l"/>
             <a:r>
-              <a:rPr sz="2850" b="1" i="0">
+              <a:rPr sz="3300" b="1" i="0">
                 <a:solidFill>
                   <a:srgbClr val="22371F"/>
                 </a:solidFill>
                 <a:latin typeface="Montserrat"/>
               </a:rPr>
-              <a:t>[COPY: Allison] Item 5, short form.</a:t>
+              <a:t>[COPY: Allison] Item 5</a:t>
             </a:r>
           </a:p>
         </p:txBody>
@@ -8147,7 +8147,7 @@
           <a:p>
             <a:pPr algn="l"/>
             <a:r>
-              <a:rPr sz="2100" b="1" i="0">
+              <a:rPr sz="3000" b="1" i="0">
                 <a:solidFill>
                   <a:srgbClr val="6A665C"/>
                 </a:solidFill>

--- a/templates/carousels/numbered-checklist.pptx
+++ b/templates/carousels/numbered-checklist.pptx
@@ -4095,9 +4095,33 @@
           </a:p>
         </p:txBody>
       </p:sp>
-      <p:sp>
-        <p:nvSpPr>
-          <p:cNvPr id="6" name="TextBox 5"/>
+      <p:pic>
+        <p:nvPicPr>
+          <p:cNvPr id="6" name="Picture 5" descr="st817168922133752987.png"/>
+          <p:cNvPicPr>
+            <a:picLocks noChangeAspect="1"/>
+          </p:cNvPicPr>
+          <p:nvPr/>
+        </p:nvPicPr>
+        <p:blipFill>
+          <a:blip r:embed="rId3"/>
+          <a:stretch>
+            <a:fillRect/>
+          </a:stretch>
+        </p:blipFill>
+        <p:spPr>
+          <a:xfrm rot="540000">
+            <a:off x="6572250" y="857250"/>
+            <a:ext cx="3848100" cy="2895600"/>
+          </a:xfrm>
+          <a:prstGeom prst="rect">
+            <a:avLst/>
+          </a:prstGeom>
+        </p:spPr>
+      </p:pic>
+      <p:sp>
+        <p:nvSpPr>
+          <p:cNvPr id="7" name="TextBox 6"/>
           <p:cNvSpPr txBox="1"/>
           <p:nvPr/>
         </p:nvSpPr>
@@ -4132,7 +4156,7 @@
       </p:sp>
       <p:sp>
         <p:nvSpPr>
-          <p:cNvPr id="7" name="Oval 6"/>
+          <p:cNvPr id="8" name="Oval 7"/>
           <p:cNvSpPr/>
           <p:nvPr/>
         </p:nvSpPr>
@@ -4176,7 +4200,7 @@
       </p:sp>
       <p:sp>
         <p:nvSpPr>
-          <p:cNvPr id="8" name="Oval 7"/>
+          <p:cNvPr id="9" name="Oval 8"/>
           <p:cNvSpPr/>
           <p:nvPr/>
         </p:nvSpPr>
@@ -4220,7 +4244,7 @@
       </p:sp>
       <p:sp>
         <p:nvSpPr>
-          <p:cNvPr id="9" name="Oval 8"/>
+          <p:cNvPr id="10" name="Oval 9"/>
           <p:cNvSpPr/>
           <p:nvPr/>
         </p:nvSpPr>
@@ -4264,7 +4288,7 @@
       </p:sp>
       <p:sp>
         <p:nvSpPr>
-          <p:cNvPr id="10" name="Oval 9"/>
+          <p:cNvPr id="11" name="Oval 10"/>
           <p:cNvSpPr/>
           <p:nvPr/>
         </p:nvSpPr>
@@ -4308,7 +4332,7 @@
       </p:sp>
       <p:sp>
         <p:nvSpPr>
-          <p:cNvPr id="11" name="Oval 10"/>
+          <p:cNvPr id="12" name="Oval 11"/>
           <p:cNvSpPr/>
           <p:nvPr/>
         </p:nvSpPr>
@@ -4352,7 +4376,7 @@
       </p:sp>
       <p:sp>
         <p:nvSpPr>
-          <p:cNvPr id="12" name="Oval 11"/>
+          <p:cNvPr id="13" name="Oval 12"/>
           <p:cNvSpPr/>
           <p:nvPr/>
         </p:nvSpPr>
@@ -4396,7 +4420,7 @@
       </p:sp>
       <p:sp>
         <p:nvSpPr>
-          <p:cNvPr id="13" name="Oval 12"/>
+          <p:cNvPr id="14" name="Oval 13"/>
           <p:cNvSpPr/>
           <p:nvPr/>
         </p:nvSpPr>

--- a/templates/carousels/numbered-checklist.pptx
+++ b/templates/carousels/numbered-checklist.pptx
@@ -4097,7 +4097,7 @@
       </p:sp>
       <p:pic>
         <p:nvPicPr>
-          <p:cNvPr id="6" name="Picture 5" descr="st817168922133752987.png"/>
+          <p:cNvPr id="6" name="Picture 5" descr="st6107550414992203228.png"/>
           <p:cNvPicPr>
             <a:picLocks noChangeAspect="1"/>
           </p:cNvPicPr>

--- a/templates/carousels/numbered-checklist.pptx
+++ b/templates/carousels/numbered-checklist.pptx
@@ -3930,7 +3930,7 @@
     <p:bg>
       <p:bgPr>
         <a:solidFill>
-          <a:srgbClr val="22371F"/>
+          <a:srgbClr val="1E3F1D"/>
         </a:solidFill>
         <a:effectLst/>
       </p:bgPr>
@@ -3957,7 +3957,7 @@
             <a:avLst/>
           </a:prstGeom>
           <a:solidFill>
-            <a:srgbClr val="C9A227"/>
+            <a:srgbClr val="D39C48"/>
           </a:solidFill>
           <a:ln>
             <a:noFill/>
@@ -4012,7 +4012,7 @@
             <a:r>
               <a:rPr sz="3000" b="1" i="0">
                 <a:solidFill>
-                  <a:srgbClr val="22371F"/>
+                  <a:srgbClr val="1E3F1D"/>
                 </a:solidFill>
                 <a:latin typeface="Montserrat"/>
               </a:rPr>
@@ -4086,7 +4086,7 @@
             <a:r>
               <a:rPr sz="5700" b="0" i="1">
                 <a:solidFill>
-                  <a:srgbClr val="DBE6A7"/>
+                  <a:srgbClr val="B1BCB1"/>
                 </a:solidFill>
                 <a:latin typeface="EB Garamond"/>
               </a:rPr>
@@ -4097,7 +4097,7 @@
       </p:sp>
       <p:pic>
         <p:nvPicPr>
-          <p:cNvPr id="6" name="Picture 5" descr="st6107550414992203228.png"/>
+          <p:cNvPr id="6" name="Picture 5" descr="st3791601828493901168.png"/>
           <p:cNvPicPr>
             <a:picLocks noChangeAspect="1"/>
           </p:cNvPicPr>
@@ -4145,7 +4145,7 @@
             <a:r>
               <a:rPr sz="3000" b="1" i="0">
                 <a:solidFill>
-                  <a:srgbClr val="A7B097"/>
+                  <a:srgbClr val="B1BCB1"/>
                 </a:solidFill>
                 <a:latin typeface="Montserrat"/>
               </a:rPr>
@@ -4169,7 +4169,7 @@
             <a:avLst/>
           </a:prstGeom>
           <a:solidFill>
-            <a:srgbClr val="DBE6A7"/>
+            <a:srgbClr val="B1BCB1"/>
           </a:solidFill>
           <a:ln>
             <a:noFill/>
@@ -4476,7 +4476,7 @@
     <p:bg>
       <p:bgPr>
         <a:solidFill>
-          <a:srgbClr val="F4F1EA"/>
+          <a:srgbClr val="F3F1EA"/>
         </a:solidFill>
         <a:effectLst/>
       </p:bgPr>
@@ -4514,7 +4514,7 @@
             <a:r>
               <a:rPr sz="48000" b="1" i="0">
                 <a:solidFill>
-                  <a:srgbClr val="156826"/>
+                  <a:srgbClr val="31662F"/>
                 </a:solidFill>
                 <a:latin typeface="Montserrat"/>
               </a:rPr>
@@ -4553,7 +4553,7 @@
             <a:r>
               <a:rPr sz="5700" b="1" i="0">
                 <a:solidFill>
-                  <a:srgbClr val="22371F"/>
+                  <a:srgbClr val="1E3F1D"/>
                 </a:solidFill>
                 <a:latin typeface="Montserrat"/>
               </a:rPr>
@@ -4581,7 +4581,7 @@
           </a:solidFill>
           <a:ln w="28575">
             <a:solidFill>
-              <a:srgbClr val="156826"/>
+              <a:srgbClr val="31662F"/>
             </a:solidFill>
           </a:ln>
           <a:effectLst/>
@@ -4634,7 +4634,7 @@
             <a:r>
               <a:rPr sz="3000" b="1" i="0">
                 <a:solidFill>
-                  <a:srgbClr val="156826"/>
+                  <a:srgbClr val="31662F"/>
                 </a:solidFill>
                 <a:latin typeface="Montserrat"/>
               </a:rPr>
@@ -4669,7 +4669,7 @@
             <a:r>
               <a:rPr sz="3000" b="1" i="0">
                 <a:solidFill>
-                  <a:srgbClr val="156826"/>
+                  <a:srgbClr val="31662F"/>
                 </a:solidFill>
                 <a:latin typeface="Montserrat"/>
               </a:rPr>
@@ -4728,7 +4728,7 @@
             <a:avLst/>
           </a:prstGeom>
           <a:solidFill>
-            <a:srgbClr val="A7B097"/>
+            <a:srgbClr val="B1BCB1"/>
           </a:solidFill>
           <a:ln>
             <a:noFill/>
@@ -4772,7 +4772,7 @@
             <a:avLst/>
           </a:prstGeom>
           <a:solidFill>
-            <a:srgbClr val="156826"/>
+            <a:srgbClr val="31662F"/>
           </a:solidFill>
           <a:ln>
             <a:noFill/>
@@ -4816,7 +4816,7 @@
             <a:avLst/>
           </a:prstGeom>
           <a:solidFill>
-            <a:srgbClr val="A7B097"/>
+            <a:srgbClr val="B1BCB1"/>
           </a:solidFill>
           <a:ln>
             <a:noFill/>
@@ -4860,7 +4860,7 @@
             <a:avLst/>
           </a:prstGeom>
           <a:solidFill>
-            <a:srgbClr val="A7B097"/>
+            <a:srgbClr val="B1BCB1"/>
           </a:solidFill>
           <a:ln>
             <a:noFill/>
@@ -4904,7 +4904,7 @@
             <a:avLst/>
           </a:prstGeom>
           <a:solidFill>
-            <a:srgbClr val="A7B097"/>
+            <a:srgbClr val="B1BCB1"/>
           </a:solidFill>
           <a:ln>
             <a:noFill/>
@@ -4948,7 +4948,7 @@
             <a:avLst/>
           </a:prstGeom>
           <a:solidFill>
-            <a:srgbClr val="A7B097"/>
+            <a:srgbClr val="B1BCB1"/>
           </a:solidFill>
           <a:ln>
             <a:noFill/>
@@ -4992,7 +4992,7 @@
             <a:avLst/>
           </a:prstGeom>
           <a:solidFill>
-            <a:srgbClr val="A7B097"/>
+            <a:srgbClr val="B1BCB1"/>
           </a:solidFill>
           <a:ln>
             <a:noFill/>
@@ -5035,7 +5035,7 @@
     <p:bg>
       <p:bgPr>
         <a:solidFill>
-          <a:srgbClr val="F4F1EA"/>
+          <a:srgbClr val="F3F1EA"/>
         </a:solidFill>
         <a:effectLst/>
       </p:bgPr>
@@ -5073,7 +5073,7 @@
             <a:r>
               <a:rPr sz="48000" b="1" i="0">
                 <a:solidFill>
-                  <a:srgbClr val="156826"/>
+                  <a:srgbClr val="31662F"/>
                 </a:solidFill>
                 <a:latin typeface="Montserrat"/>
               </a:rPr>
@@ -5112,7 +5112,7 @@
             <a:r>
               <a:rPr sz="5700" b="1" i="0">
                 <a:solidFill>
-                  <a:srgbClr val="22371F"/>
+                  <a:srgbClr val="1E3F1D"/>
                 </a:solidFill>
                 <a:latin typeface="Montserrat"/>
               </a:rPr>
@@ -5140,7 +5140,7 @@
           </a:solidFill>
           <a:ln w="28575">
             <a:solidFill>
-              <a:srgbClr val="156826"/>
+              <a:srgbClr val="31662F"/>
             </a:solidFill>
           </a:ln>
           <a:effectLst/>
@@ -5193,7 +5193,7 @@
             <a:r>
               <a:rPr sz="3000" b="1" i="0">
                 <a:solidFill>
-                  <a:srgbClr val="156826"/>
+                  <a:srgbClr val="31662F"/>
                 </a:solidFill>
                 <a:latin typeface="Montserrat"/>
               </a:rPr>
@@ -5228,7 +5228,7 @@
             <a:r>
               <a:rPr sz="3000" b="1" i="0">
                 <a:solidFill>
-                  <a:srgbClr val="156826"/>
+                  <a:srgbClr val="31662F"/>
                 </a:solidFill>
                 <a:latin typeface="Montserrat"/>
               </a:rPr>
@@ -5287,7 +5287,7 @@
             <a:avLst/>
           </a:prstGeom>
           <a:solidFill>
-            <a:srgbClr val="A7B097"/>
+            <a:srgbClr val="B1BCB1"/>
           </a:solidFill>
           <a:ln>
             <a:noFill/>
@@ -5331,7 +5331,7 @@
             <a:avLst/>
           </a:prstGeom>
           <a:solidFill>
-            <a:srgbClr val="A7B097"/>
+            <a:srgbClr val="B1BCB1"/>
           </a:solidFill>
           <a:ln>
             <a:noFill/>
@@ -5375,7 +5375,7 @@
             <a:avLst/>
           </a:prstGeom>
           <a:solidFill>
-            <a:srgbClr val="156826"/>
+            <a:srgbClr val="31662F"/>
           </a:solidFill>
           <a:ln>
             <a:noFill/>
@@ -5419,7 +5419,7 @@
             <a:avLst/>
           </a:prstGeom>
           <a:solidFill>
-            <a:srgbClr val="A7B097"/>
+            <a:srgbClr val="B1BCB1"/>
           </a:solidFill>
           <a:ln>
             <a:noFill/>
@@ -5463,7 +5463,7 @@
             <a:avLst/>
           </a:prstGeom>
           <a:solidFill>
-            <a:srgbClr val="A7B097"/>
+            <a:srgbClr val="B1BCB1"/>
           </a:solidFill>
           <a:ln>
             <a:noFill/>
@@ -5507,7 +5507,7 @@
             <a:avLst/>
           </a:prstGeom>
           <a:solidFill>
-            <a:srgbClr val="A7B097"/>
+            <a:srgbClr val="B1BCB1"/>
           </a:solidFill>
           <a:ln>
             <a:noFill/>
@@ -5551,7 +5551,7 @@
             <a:avLst/>
           </a:prstGeom>
           <a:solidFill>
-            <a:srgbClr val="A7B097"/>
+            <a:srgbClr val="B1BCB1"/>
           </a:solidFill>
           <a:ln>
             <a:noFill/>
@@ -5594,7 +5594,7 @@
     <p:bg>
       <p:bgPr>
         <a:solidFill>
-          <a:srgbClr val="F4F1EA"/>
+          <a:srgbClr val="F3F1EA"/>
         </a:solidFill>
         <a:effectLst/>
       </p:bgPr>
@@ -5632,7 +5632,7 @@
             <a:r>
               <a:rPr sz="48000" b="1" i="0">
                 <a:solidFill>
-                  <a:srgbClr val="156826"/>
+                  <a:srgbClr val="31662F"/>
                 </a:solidFill>
                 <a:latin typeface="Montserrat"/>
               </a:rPr>
@@ -5671,7 +5671,7 @@
             <a:r>
               <a:rPr sz="5700" b="1" i="0">
                 <a:solidFill>
-                  <a:srgbClr val="22371F"/>
+                  <a:srgbClr val="1E3F1D"/>
                 </a:solidFill>
                 <a:latin typeface="Montserrat"/>
               </a:rPr>
@@ -5699,7 +5699,7 @@
           </a:solidFill>
           <a:ln w="28575">
             <a:solidFill>
-              <a:srgbClr val="156826"/>
+              <a:srgbClr val="31662F"/>
             </a:solidFill>
           </a:ln>
           <a:effectLst/>
@@ -5752,7 +5752,7 @@
             <a:r>
               <a:rPr sz="3000" b="1" i="0">
                 <a:solidFill>
-                  <a:srgbClr val="156826"/>
+                  <a:srgbClr val="31662F"/>
                 </a:solidFill>
                 <a:latin typeface="Montserrat"/>
               </a:rPr>
@@ -5787,7 +5787,7 @@
             <a:r>
               <a:rPr sz="3000" b="1" i="0">
                 <a:solidFill>
-                  <a:srgbClr val="156826"/>
+                  <a:srgbClr val="31662F"/>
                 </a:solidFill>
                 <a:latin typeface="Montserrat"/>
               </a:rPr>
@@ -5846,7 +5846,7 @@
             <a:avLst/>
           </a:prstGeom>
           <a:solidFill>
-            <a:srgbClr val="A7B097"/>
+            <a:srgbClr val="B1BCB1"/>
           </a:solidFill>
           <a:ln>
             <a:noFill/>
@@ -5890,7 +5890,7 @@
             <a:avLst/>
           </a:prstGeom>
           <a:solidFill>
-            <a:srgbClr val="A7B097"/>
+            <a:srgbClr val="B1BCB1"/>
           </a:solidFill>
           <a:ln>
             <a:noFill/>
@@ -5934,7 +5934,7 @@
             <a:avLst/>
           </a:prstGeom>
           <a:solidFill>
-            <a:srgbClr val="A7B097"/>
+            <a:srgbClr val="B1BCB1"/>
           </a:solidFill>
           <a:ln>
             <a:noFill/>
@@ -5978,7 +5978,7 @@
             <a:avLst/>
           </a:prstGeom>
           <a:solidFill>
-            <a:srgbClr val="156826"/>
+            <a:srgbClr val="31662F"/>
           </a:solidFill>
           <a:ln>
             <a:noFill/>
@@ -6022,7 +6022,7 @@
             <a:avLst/>
           </a:prstGeom>
           <a:solidFill>
-            <a:srgbClr val="A7B097"/>
+            <a:srgbClr val="B1BCB1"/>
           </a:solidFill>
           <a:ln>
             <a:noFill/>
@@ -6066,7 +6066,7 @@
             <a:avLst/>
           </a:prstGeom>
           <a:solidFill>
-            <a:srgbClr val="A7B097"/>
+            <a:srgbClr val="B1BCB1"/>
           </a:solidFill>
           <a:ln>
             <a:noFill/>
@@ -6110,7 +6110,7 @@
             <a:avLst/>
           </a:prstGeom>
           <a:solidFill>
-            <a:srgbClr val="A7B097"/>
+            <a:srgbClr val="B1BCB1"/>
           </a:solidFill>
           <a:ln>
             <a:noFill/>
@@ -6153,7 +6153,7 @@
     <p:bg>
       <p:bgPr>
         <a:solidFill>
-          <a:srgbClr val="F4F1EA"/>
+          <a:srgbClr val="F3F1EA"/>
         </a:solidFill>
         <a:effectLst/>
       </p:bgPr>
@@ -6191,7 +6191,7 @@
             <a:r>
               <a:rPr sz="48000" b="1" i="0">
                 <a:solidFill>
-                  <a:srgbClr val="156826"/>
+                  <a:srgbClr val="31662F"/>
                 </a:solidFill>
                 <a:latin typeface="Montserrat"/>
               </a:rPr>
@@ -6230,7 +6230,7 @@
             <a:r>
               <a:rPr sz="5700" b="1" i="0">
                 <a:solidFill>
-                  <a:srgbClr val="22371F"/>
+                  <a:srgbClr val="1E3F1D"/>
                 </a:solidFill>
                 <a:latin typeface="Montserrat"/>
               </a:rPr>
@@ -6258,7 +6258,7 @@
           </a:solidFill>
           <a:ln w="28575">
             <a:solidFill>
-              <a:srgbClr val="156826"/>
+              <a:srgbClr val="31662F"/>
             </a:solidFill>
           </a:ln>
           <a:effectLst/>
@@ -6311,7 +6311,7 @@
             <a:r>
               <a:rPr sz="3000" b="1" i="0">
                 <a:solidFill>
-                  <a:srgbClr val="156826"/>
+                  <a:srgbClr val="31662F"/>
                 </a:solidFill>
                 <a:latin typeface="Montserrat"/>
               </a:rPr>
@@ -6346,7 +6346,7 @@
             <a:r>
               <a:rPr sz="3000" b="1" i="0">
                 <a:solidFill>
-                  <a:srgbClr val="156826"/>
+                  <a:srgbClr val="31662F"/>
                 </a:solidFill>
                 <a:latin typeface="Montserrat"/>
               </a:rPr>
@@ -6405,7 +6405,7 @@
             <a:avLst/>
           </a:prstGeom>
           <a:solidFill>
-            <a:srgbClr val="A7B097"/>
+            <a:srgbClr val="B1BCB1"/>
           </a:solidFill>
           <a:ln>
             <a:noFill/>
@@ -6449,7 +6449,7 @@
             <a:avLst/>
           </a:prstGeom>
           <a:solidFill>
-            <a:srgbClr val="A7B097"/>
+            <a:srgbClr val="B1BCB1"/>
           </a:solidFill>
           <a:ln>
             <a:noFill/>
@@ -6493,7 +6493,7 @@
             <a:avLst/>
           </a:prstGeom>
           <a:solidFill>
-            <a:srgbClr val="A7B097"/>
+            <a:srgbClr val="B1BCB1"/>
           </a:solidFill>
           <a:ln>
             <a:noFill/>
@@ -6537,7 +6537,7 @@
             <a:avLst/>
           </a:prstGeom>
           <a:solidFill>
-            <a:srgbClr val="A7B097"/>
+            <a:srgbClr val="B1BCB1"/>
           </a:solidFill>
           <a:ln>
             <a:noFill/>
@@ -6581,7 +6581,7 @@
             <a:avLst/>
           </a:prstGeom>
           <a:solidFill>
-            <a:srgbClr val="156826"/>
+            <a:srgbClr val="31662F"/>
           </a:solidFill>
           <a:ln>
             <a:noFill/>
@@ -6625,7 +6625,7 @@
             <a:avLst/>
           </a:prstGeom>
           <a:solidFill>
-            <a:srgbClr val="A7B097"/>
+            <a:srgbClr val="B1BCB1"/>
           </a:solidFill>
           <a:ln>
             <a:noFill/>
@@ -6669,7 +6669,7 @@
             <a:avLst/>
           </a:prstGeom>
           <a:solidFill>
-            <a:srgbClr val="A7B097"/>
+            <a:srgbClr val="B1BCB1"/>
           </a:solidFill>
           <a:ln>
             <a:noFill/>
@@ -6712,7 +6712,7 @@
     <p:bg>
       <p:bgPr>
         <a:solidFill>
-          <a:srgbClr val="F4F1EA"/>
+          <a:srgbClr val="F3F1EA"/>
         </a:solidFill>
         <a:effectLst/>
       </p:bgPr>
@@ -6750,7 +6750,7 @@
             <a:r>
               <a:rPr sz="48000" b="1" i="0">
                 <a:solidFill>
-                  <a:srgbClr val="156826"/>
+                  <a:srgbClr val="31662F"/>
                 </a:solidFill>
                 <a:latin typeface="Montserrat"/>
               </a:rPr>
@@ -6789,7 +6789,7 @@
             <a:r>
               <a:rPr sz="5700" b="1" i="0">
                 <a:solidFill>
-                  <a:srgbClr val="22371F"/>
+                  <a:srgbClr val="1E3F1D"/>
                 </a:solidFill>
                 <a:latin typeface="Montserrat"/>
               </a:rPr>
@@ -6817,7 +6817,7 @@
           </a:solidFill>
           <a:ln w="28575">
             <a:solidFill>
-              <a:srgbClr val="156826"/>
+              <a:srgbClr val="31662F"/>
             </a:solidFill>
           </a:ln>
           <a:effectLst/>
@@ -6870,7 +6870,7 @@
             <a:r>
               <a:rPr sz="3000" b="1" i="0">
                 <a:solidFill>
-                  <a:srgbClr val="156826"/>
+                  <a:srgbClr val="31662F"/>
                 </a:solidFill>
                 <a:latin typeface="Montserrat"/>
               </a:rPr>
@@ -6905,7 +6905,7 @@
             <a:r>
               <a:rPr sz="3000" b="1" i="0">
                 <a:solidFill>
-                  <a:srgbClr val="156826"/>
+                  <a:srgbClr val="31662F"/>
                 </a:solidFill>
                 <a:latin typeface="Montserrat"/>
               </a:rPr>
@@ -6964,7 +6964,7 @@
             <a:avLst/>
           </a:prstGeom>
           <a:solidFill>
-            <a:srgbClr val="A7B097"/>
+            <a:srgbClr val="B1BCB1"/>
           </a:solidFill>
           <a:ln>
             <a:noFill/>
@@ -7008,7 +7008,7 @@
             <a:avLst/>
           </a:prstGeom>
           <a:solidFill>
-            <a:srgbClr val="A7B097"/>
+            <a:srgbClr val="B1BCB1"/>
           </a:solidFill>
           <a:ln>
             <a:noFill/>
@@ -7052,7 +7052,7 @@
             <a:avLst/>
           </a:prstGeom>
           <a:solidFill>
-            <a:srgbClr val="A7B097"/>
+            <a:srgbClr val="B1BCB1"/>
           </a:solidFill>
           <a:ln>
             <a:noFill/>
@@ -7096,7 +7096,7 @@
             <a:avLst/>
           </a:prstGeom>
           <a:solidFill>
-            <a:srgbClr val="A7B097"/>
+            <a:srgbClr val="B1BCB1"/>
           </a:solidFill>
           <a:ln>
             <a:noFill/>
@@ -7140,7 +7140,7 @@
             <a:avLst/>
           </a:prstGeom>
           <a:solidFill>
-            <a:srgbClr val="A7B097"/>
+            <a:srgbClr val="B1BCB1"/>
           </a:solidFill>
           <a:ln>
             <a:noFill/>
@@ -7184,7 +7184,7 @@
             <a:avLst/>
           </a:prstGeom>
           <a:solidFill>
-            <a:srgbClr val="156826"/>
+            <a:srgbClr val="31662F"/>
           </a:solidFill>
           <a:ln>
             <a:noFill/>
@@ -7228,7 +7228,7 @@
             <a:avLst/>
           </a:prstGeom>
           <a:solidFill>
-            <a:srgbClr val="A7B097"/>
+            <a:srgbClr val="B1BCB1"/>
           </a:solidFill>
           <a:ln>
             <a:noFill/>
@@ -7309,7 +7309,7 @@
             <a:r>
               <a:rPr sz="3000" b="1" i="0">
                 <a:solidFill>
-                  <a:srgbClr val="156826"/>
+                  <a:srgbClr val="31662F"/>
                 </a:solidFill>
                 <a:latin typeface="Montserrat"/>
               </a:rPr>
@@ -7348,7 +7348,7 @@
             <a:r>
               <a:rPr sz="3600" b="1" i="0">
                 <a:solidFill>
-                  <a:srgbClr val="22371F"/>
+                  <a:srgbClr val="1E3F1D"/>
                 </a:solidFill>
                 <a:latin typeface="Montserrat"/>
               </a:rPr>
@@ -7416,7 +7416,7 @@
             <a:avLst/>
           </a:prstGeom>
           <a:solidFill>
-            <a:srgbClr val="156826"/>
+            <a:srgbClr val="31662F"/>
           </a:solidFill>
           <a:ln>
             <a:noFill/>
@@ -7471,7 +7471,7 @@
             <a:r>
               <a:rPr sz="3000" b="1" i="0">
                 <a:solidFill>
-                  <a:srgbClr val="DBE6A7"/>
+                  <a:srgbClr val="B1BCB1"/>
                 </a:solidFill>
                 <a:latin typeface="Montserrat"/>
               </a:rPr>
@@ -7506,7 +7506,7 @@
             <a:r>
               <a:rPr sz="3300" b="1" i="0">
                 <a:solidFill>
-                  <a:srgbClr val="22371F"/>
+                  <a:srgbClr val="1E3F1D"/>
                 </a:solidFill>
                 <a:latin typeface="Montserrat"/>
               </a:rPr>
@@ -7574,7 +7574,7 @@
             <a:avLst/>
           </a:prstGeom>
           <a:solidFill>
-            <a:srgbClr val="156826"/>
+            <a:srgbClr val="31662F"/>
           </a:solidFill>
           <a:ln>
             <a:noFill/>
@@ -7629,7 +7629,7 @@
             <a:r>
               <a:rPr sz="3000" b="1" i="0">
                 <a:solidFill>
-                  <a:srgbClr val="DBE6A7"/>
+                  <a:srgbClr val="B1BCB1"/>
                 </a:solidFill>
                 <a:latin typeface="Montserrat"/>
               </a:rPr>
@@ -7664,7 +7664,7 @@
             <a:r>
               <a:rPr sz="3300" b="1" i="0">
                 <a:solidFill>
-                  <a:srgbClr val="22371F"/>
+                  <a:srgbClr val="1E3F1D"/>
                 </a:solidFill>
                 <a:latin typeface="Montserrat"/>
               </a:rPr>
@@ -7732,7 +7732,7 @@
             <a:avLst/>
           </a:prstGeom>
           <a:solidFill>
-            <a:srgbClr val="156826"/>
+            <a:srgbClr val="31662F"/>
           </a:solidFill>
           <a:ln>
             <a:noFill/>
@@ -7787,7 +7787,7 @@
             <a:r>
               <a:rPr sz="3000" b="1" i="0">
                 <a:solidFill>
-                  <a:srgbClr val="DBE6A7"/>
+                  <a:srgbClr val="B1BCB1"/>
                 </a:solidFill>
                 <a:latin typeface="Montserrat"/>
               </a:rPr>
@@ -7822,7 +7822,7 @@
             <a:r>
               <a:rPr sz="3300" b="1" i="0">
                 <a:solidFill>
-                  <a:srgbClr val="22371F"/>
+                  <a:srgbClr val="1E3F1D"/>
                 </a:solidFill>
                 <a:latin typeface="Montserrat"/>
               </a:rPr>
@@ -7890,7 +7890,7 @@
             <a:avLst/>
           </a:prstGeom>
           <a:solidFill>
-            <a:srgbClr val="156826"/>
+            <a:srgbClr val="31662F"/>
           </a:solidFill>
           <a:ln>
             <a:noFill/>
@@ -7945,7 +7945,7 @@
             <a:r>
               <a:rPr sz="3000" b="1" i="0">
                 <a:solidFill>
-                  <a:srgbClr val="DBE6A7"/>
+                  <a:srgbClr val="B1BCB1"/>
                 </a:solidFill>
                 <a:latin typeface="Montserrat"/>
               </a:rPr>
@@ -7980,7 +7980,7 @@
             <a:r>
               <a:rPr sz="3300" b="1" i="0">
                 <a:solidFill>
-                  <a:srgbClr val="22371F"/>
+                  <a:srgbClr val="1E3F1D"/>
                 </a:solidFill>
                 <a:latin typeface="Montserrat"/>
               </a:rPr>
@@ -8048,7 +8048,7 @@
             <a:avLst/>
           </a:prstGeom>
           <a:solidFill>
-            <a:srgbClr val="156826"/>
+            <a:srgbClr val="31662F"/>
           </a:solidFill>
           <a:ln>
             <a:noFill/>
@@ -8103,7 +8103,7 @@
             <a:r>
               <a:rPr sz="3000" b="1" i="0">
                 <a:solidFill>
-                  <a:srgbClr val="DBE6A7"/>
+                  <a:srgbClr val="B1BCB1"/>
                 </a:solidFill>
                 <a:latin typeface="Montserrat"/>
               </a:rPr>
@@ -8138,7 +8138,7 @@
             <a:r>
               <a:rPr sz="3300" b="1" i="0">
                 <a:solidFill>
-                  <a:srgbClr val="22371F"/>
+                  <a:srgbClr val="1E3F1D"/>
                 </a:solidFill>
                 <a:latin typeface="Montserrat"/>
               </a:rPr>
@@ -8197,7 +8197,7 @@
             <a:avLst/>
           </a:prstGeom>
           <a:solidFill>
-            <a:srgbClr val="A7B097"/>
+            <a:srgbClr val="B1BCB1"/>
           </a:solidFill>
           <a:ln>
             <a:noFill/>
@@ -8241,7 +8241,7 @@
             <a:avLst/>
           </a:prstGeom>
           <a:solidFill>
-            <a:srgbClr val="A7B097"/>
+            <a:srgbClr val="B1BCB1"/>
           </a:solidFill>
           <a:ln>
             <a:noFill/>
@@ -8285,7 +8285,7 @@
             <a:avLst/>
           </a:prstGeom>
           <a:solidFill>
-            <a:srgbClr val="A7B097"/>
+            <a:srgbClr val="B1BCB1"/>
           </a:solidFill>
           <a:ln>
             <a:noFill/>
@@ -8329,7 +8329,7 @@
             <a:avLst/>
           </a:prstGeom>
           <a:solidFill>
-            <a:srgbClr val="A7B097"/>
+            <a:srgbClr val="B1BCB1"/>
           </a:solidFill>
           <a:ln>
             <a:noFill/>
@@ -8373,7 +8373,7 @@
             <a:avLst/>
           </a:prstGeom>
           <a:solidFill>
-            <a:srgbClr val="A7B097"/>
+            <a:srgbClr val="B1BCB1"/>
           </a:solidFill>
           <a:ln>
             <a:noFill/>
@@ -8417,7 +8417,7 @@
             <a:avLst/>
           </a:prstGeom>
           <a:solidFill>
-            <a:srgbClr val="A7B097"/>
+            <a:srgbClr val="B1BCB1"/>
           </a:solidFill>
           <a:ln>
             <a:noFill/>
@@ -8461,7 +8461,7 @@
             <a:avLst/>
           </a:prstGeom>
           <a:solidFill>
-            <a:srgbClr val="156826"/>
+            <a:srgbClr val="31662F"/>
           </a:solidFill>
           <a:ln>
             <a:noFill/>
